--- a/10-plantas/01-steelmaking/05-capacitacion/MS-ACE-02/MS-ACE-02_Capacitacion_AMMX.pptx
+++ b/10-plantas/01-steelmaking/05-capacitacion/MS-ACE-02/MS-ACE-02_Capacitacion_AMMX.pptx
@@ -19144,7 +19144,7 @@
                 <a:ea typeface="Calibri" pitchFamily="34" charset="-122"/>
                 <a:cs typeface="Calibri" pitchFamily="34" charset="-120"/>
               </a:rPr>
-              <a:t>Siguiente paso: OJT supervisado y evaluación práctica (TD-P07); registro en IMaS y DC-3/SIRCE. Validación: visto bueno seguridad (pendientes: técnica, laboral, diseño instruccional).</a:t>
+              <a:t>Siguiente paso: OJT supervisado y evaluación práctica (TD-P07); registro en IMaS y DC-3/SIRCE. Validación: visto bueno técnica, seguridad, laboral, diseño instruccional.</a:t>
             </a:r>
             <a:endParaRPr lang="en-US" sz="750" dirty="0"/>
           </a:p>
